--- a/dist/KCube-Maven-Goals-매뉴얼.pptx
+++ b/dist/KCube-Maven-Goals-매뉴얼.pptx
@@ -13,6 +13,8 @@
     <p:sldId id="261" r:id="rId7"/>
     <p:sldId id="262" r:id="rId8"/>
     <p:sldId id="263" r:id="rId9"/>
+    <p:sldId id="265" r:id="rId16"/>
+    <p:sldId id="266" r:id="rId17"/>
     <p:sldId id="264" r:id="rId10"/>
   </p:sldIdLst>
   <p:notesMasterIdLst>
@@ -1916,6 +1918,804 @@
 </p:sld>
 </file>
 
+<file path=ppt/slides/slide10.xml><?xml version="1.0" encoding="utf-8"?>
+<p:sld xmlns:a="http://schemas.openxmlformats.org/drawingml/2006/main" xmlns:p="http://schemas.openxmlformats.org/presentationml/2006/main" xmlns:r="http://schemas.openxmlformats.org/officeDocument/2006/relationships">
+  <p:cSld>
+    <p:spTree>
+      <p:nvGrpSpPr>
+        <p:cNvPr id="1" name=""/>
+        <p:cNvGrpSpPr/>
+        <p:nvPr/>
+      </p:nvGrpSpPr>
+      <p:grpSpPr/>
+      <p:sp>
+        <p:nvSpPr>
+          <p:cNvPr id="2" name="Title"/>
+          <p:cNvSpPr txBox="1"/>
+          <p:nvPr/>
+        </p:nvSpPr>
+        <p:spPr>
+          <a:xfrm>
+            <a:off x="457200" y="274320"/>
+            <a:ext cx="8229600" cy="640080"/>
+          </a:xfrm>
+          <a:prstGeom prst="rect">
+            <a:avLst/>
+          </a:prstGeom>
+          <a:noFill/>
+          <a:ln/>
+        </p:spPr>
+        <p:txBody>
+          <a:bodyPr wrap="square" lIns="0" tIns="0" rIns="0" bIns="0" rtlCol="0" anchor="ctr"/>
+          <a:lstStyle/>
+          <a:p>
+            <a:pPr indent="0" marL="0">
+              <a:buNone/>
+            </a:pPr>
+            <a:r>
+              <a:rPr lang="en-US" sz="3200" b="1" dirty="0">
+                <a:solidFill>
+                  <a:schemeClr val="tx1"/>
+                </a:solidFill>
+                <a:latin typeface="Cambria" pitchFamily="34" charset="0"/>
+                <a:ea typeface="Cambria" pitchFamily="34" charset="-122"/>
+                <a:cs typeface="Cambria" pitchFamily="34" charset="-120"/>
+              </a:rPr>
+              <a:t>편의 기능</a:t>
+            </a:r>
+            <a:endParaRPr lang="en-US" sz="3200" dirty="0"/>
+          </a:p>
+        </p:txBody>
+      </p:sp>
+      <p:sp>
+        <p:nvSpPr>
+          <p:cNvPr id="3" name="Trouble card 1"/>
+          <p:cNvSpPr/>
+          <p:nvPr/>
+        </p:nvSpPr>
+        <p:spPr>
+          <a:xfrm>
+            <a:off x="457200" y="1097280"/>
+            <a:ext cx="8229600" cy="822960"/>
+          </a:xfrm>
+          <a:prstGeom prst="roundRect">
+            <a:avLst>
+              <a:gd name="adj" fmla="val 8889"/>
+            </a:avLst>
+          </a:prstGeom>
+          <a:solidFill>
+            <a:schemeClr val="bg2"/>
+          </a:solidFill>
+          <a:ln w="9525">
+            <a:solidFill>
+              <a:schemeClr val="accent5"/>
+            </a:solidFill>
+            <a:prstDash val="solid"/>
+          </a:ln>
+        </p:spPr>
+      </p:sp>
+      <p:sp>
+        <p:nvSpPr>
+          <p:cNvPr id="4" name="Trouble title 1"/>
+          <p:cNvSpPr txBox="1"/>
+          <p:nvPr/>
+        </p:nvSpPr>
+        <p:spPr>
+          <a:xfrm>
+            <a:off x="685800" y="1097280"/>
+            <a:ext cx="2743200" cy="822960"/>
+          </a:xfrm>
+          <a:prstGeom prst="rect">
+            <a:avLst/>
+          </a:prstGeom>
+          <a:noFill/>
+          <a:ln/>
+        </p:spPr>
+        <p:txBody>
+          <a:bodyPr wrap="square" lIns="0" tIns="0" rIns="0" bIns="0" rtlCol="0" anchor="ctr"/>
+          <a:lstStyle/>
+          <a:p>
+            <a:pPr indent="0" marL="0">
+              <a:buNone/>
+            </a:pPr>
+            <a:r>
+              <a:rPr lang="en-US" sz="1500" b="1" dirty="0">
+                <a:solidFill>
+                  <a:schemeClr val="tx1"/>
+                </a:solidFill>
+              </a:rPr>
+              <a:t>Goal 검색</a:t>
+            </a:r>
+            <a:endParaRPr lang="en-US" sz="1500" dirty="0"/>
+          </a:p>
+        </p:txBody>
+      </p:sp>
+      <p:sp>
+        <p:nvSpPr>
+          <p:cNvPr id="5" name="Trouble text 1"/>
+          <p:cNvSpPr txBox="1"/>
+          <p:nvPr/>
+        </p:nvSpPr>
+        <p:spPr>
+          <a:xfrm>
+            <a:off x="3566160" y="1097280"/>
+            <a:ext cx="4937760" cy="822960"/>
+          </a:xfrm>
+          <a:prstGeom prst="rect">
+            <a:avLst/>
+          </a:prstGeom>
+          <a:noFill/>
+          <a:ln/>
+        </p:spPr>
+        <p:txBody>
+          <a:bodyPr wrap="square" lIns="0" tIns="0" rIns="0" bIns="0" rtlCol="0" anchor="ctr"/>
+          <a:lstStyle/>
+          <a:p>
+            <a:pPr indent="0" marL="0">
+              <a:buNone/>
+            </a:pPr>
+            <a:r>
+              <a:rPr lang="en-US" sz="1300" dirty="0">
+                <a:solidFill>
+                  <a:schemeClr val="tx2"/>
+                </a:solidFill>
+              </a:rPr>
+              <a:t>트리 위 검색창에 키워드를 입력하면 일치하는 goal만 표시됩니다. Esc로 해제합니다.</a:t>
+            </a:r>
+            <a:endParaRPr lang="en-US" sz="1300" dirty="0"/>
+          </a:p>
+        </p:txBody>
+      </p:sp>
+      <p:sp>
+        <p:nvSpPr>
+          <p:cNvPr id="6" name="Trouble card 2"/>
+          <p:cNvSpPr/>
+          <p:nvPr/>
+        </p:nvSpPr>
+        <p:spPr>
+          <a:xfrm>
+            <a:off x="457200" y="2029968"/>
+            <a:ext cx="8229600" cy="822960"/>
+          </a:xfrm>
+          <a:prstGeom prst="roundRect">
+            <a:avLst>
+              <a:gd name="adj" fmla="val 8889"/>
+            </a:avLst>
+          </a:prstGeom>
+          <a:solidFill>
+            <a:schemeClr val="bg2"/>
+          </a:solidFill>
+          <a:ln w="9525">
+            <a:solidFill>
+              <a:schemeClr val="accent5"/>
+            </a:solidFill>
+            <a:prstDash val="solid"/>
+          </a:ln>
+        </p:spPr>
+      </p:sp>
+      <p:sp>
+        <p:nvSpPr>
+          <p:cNvPr id="7" name="Trouble title 2"/>
+          <p:cNvSpPr txBox="1"/>
+          <p:nvPr/>
+        </p:nvSpPr>
+        <p:spPr>
+          <a:xfrm>
+            <a:off x="685800" y="2029968"/>
+            <a:ext cx="2743200" cy="822960"/>
+          </a:xfrm>
+          <a:prstGeom prst="rect">
+            <a:avLst/>
+          </a:prstGeom>
+          <a:noFill/>
+          <a:ln/>
+        </p:spPr>
+        <p:txBody>
+          <a:bodyPr wrap="square" lIns="0" tIns="0" rIns="0" bIns="0" rtlCol="0" anchor="ctr"/>
+          <a:lstStyle/>
+          <a:p>
+            <a:pPr indent="0" marL="0">
+              <a:buNone/>
+            </a:pPr>
+            <a:r>
+              <a:rPr lang="en-US" sz="1500" b="1" dirty="0">
+                <a:solidFill>
+                  <a:schemeClr val="tx1"/>
+                </a:solidFill>
+              </a:rPr>
+              <a:t>즐겨찾기 / 최근 실행</a:t>
+            </a:r>
+            <a:endParaRPr lang="en-US" sz="1500" dirty="0"/>
+          </a:p>
+        </p:txBody>
+      </p:sp>
+      <p:sp>
+        <p:nvSpPr>
+          <p:cNvPr id="8" name="Trouble text 2"/>
+          <p:cNvSpPr txBox="1"/>
+          <p:nvPr/>
+        </p:nvSpPr>
+        <p:spPr>
+          <a:xfrm>
+            <a:off x="3566160" y="2029968"/>
+            <a:ext cx="4937760" cy="822960"/>
+          </a:xfrm>
+          <a:prstGeom prst="rect">
+            <a:avLst/>
+          </a:prstGeom>
+          <a:noFill/>
+          <a:ln/>
+        </p:spPr>
+        <p:txBody>
+          <a:bodyPr wrap="square" lIns="0" tIns="0" rIns="0" bIns="0" rtlCol="0" anchor="ctr"/>
+          <a:lstStyle/>
+          <a:p>
+            <a:pPr indent="0" marL="0">
+              <a:buNone/>
+            </a:pPr>
+            <a:r>
+              <a:rPr lang="en-US" sz="1300" dirty="0">
+                <a:solidFill>
+                  <a:schemeClr val="tx2"/>
+                </a:solidFill>
+              </a:rPr>
+              <a:t>우클릭 → Add to Favorites(★). 툴바 드롭다운에서 즐겨찾기와 최근 실행 10개를 바로 실행합니다.</a:t>
+            </a:r>
+            <a:endParaRPr lang="en-US" sz="1300" dirty="0"/>
+          </a:p>
+        </p:txBody>
+      </p:sp>
+      <p:sp>
+        <p:nvSpPr>
+          <p:cNvPr id="9" name="Trouble card 3"/>
+          <p:cNvSpPr/>
+          <p:nvPr/>
+        </p:nvSpPr>
+        <p:spPr>
+          <a:xfrm>
+            <a:off x="457200" y="2962656"/>
+            <a:ext cx="8229600" cy="822960"/>
+          </a:xfrm>
+          <a:prstGeom prst="roundRect">
+            <a:avLst>
+              <a:gd name="adj" fmla="val 8889"/>
+            </a:avLst>
+          </a:prstGeom>
+          <a:solidFill>
+            <a:schemeClr val="bg2"/>
+          </a:solidFill>
+          <a:ln w="9525">
+            <a:solidFill>
+              <a:schemeClr val="accent5"/>
+            </a:solidFill>
+            <a:prstDash val="solid"/>
+          </a:ln>
+        </p:spPr>
+      </p:sp>
+      <p:sp>
+        <p:nvSpPr>
+          <p:cNvPr id="10" name="Trouble title 3"/>
+          <p:cNvSpPr txBox="1"/>
+          <p:nvPr/>
+        </p:nvSpPr>
+        <p:spPr>
+          <a:xfrm>
+            <a:off x="685800" y="2962656"/>
+            <a:ext cx="2743200" cy="822960"/>
+          </a:xfrm>
+          <a:prstGeom prst="rect">
+            <a:avLst/>
+          </a:prstGeom>
+          <a:noFill/>
+          <a:ln/>
+        </p:spPr>
+        <p:txBody>
+          <a:bodyPr wrap="square" lIns="0" tIns="0" rIns="0" bIns="0" rtlCol="0" anchor="ctr"/>
+          <a:lstStyle/>
+          <a:p>
+            <a:pPr indent="0" marL="0">
+              <a:buNone/>
+            </a:pPr>
+            <a:r>
+              <a:rPr lang="en-US" sz="1500" b="1" dirty="0">
+                <a:solidFill>
+                  <a:schemeClr val="tx1"/>
+                </a:solidFill>
+              </a:rPr>
+              <a:t>Run with Options…</a:t>
+            </a:r>
+            <a:endParaRPr lang="en-US" sz="1500" dirty="0"/>
+          </a:p>
+        </p:txBody>
+      </p:sp>
+      <p:sp>
+        <p:nvSpPr>
+          <p:cNvPr id="11" name="Trouble text 3"/>
+          <p:cNvSpPr txBox="1"/>
+          <p:nvPr/>
+        </p:nvSpPr>
+        <p:spPr>
+          <a:xfrm>
+            <a:off x="3566160" y="2962656"/>
+            <a:ext cx="4937760" cy="822960"/>
+          </a:xfrm>
+          <a:prstGeom prst="rect">
+            <a:avLst/>
+          </a:prstGeom>
+          <a:noFill/>
+          <a:ln/>
+        </p:spPr>
+        <p:txBody>
+          <a:bodyPr wrap="square" lIns="0" tIns="0" rIns="0" bIns="0" rtlCol="0" anchor="ctr"/>
+          <a:lstStyle/>
+          <a:p>
+            <a:pPr indent="0" marL="0">
+              <a:buNone/>
+            </a:pPr>
+            <a:r>
+              <a:rPr lang="en-US" sz="1300" dirty="0">
+                <a:solidFill>
+                  <a:schemeClr val="tx2"/>
+                </a:solidFill>
+              </a:rPr>
+              <a:t>우클릭 → goal 수정, 프로파일(-P), -DskipTests, -o, -U, 추가 인자를 지정해 실행합니다.</a:t>
+            </a:r>
+            <a:endParaRPr lang="en-US" sz="1300" dirty="0"/>
+          </a:p>
+        </p:txBody>
+      </p:sp>
+      <p:sp>
+        <p:nvSpPr>
+          <p:cNvPr id="12" name="Trouble card 4"/>
+          <p:cNvSpPr/>
+          <p:nvPr/>
+        </p:nvSpPr>
+        <p:spPr>
+          <a:xfrm>
+            <a:off x="457200" y="3895344"/>
+            <a:ext cx="8229600" cy="822960"/>
+          </a:xfrm>
+          <a:prstGeom prst="roundRect">
+            <a:avLst>
+              <a:gd name="adj" fmla="val 8889"/>
+            </a:avLst>
+          </a:prstGeom>
+          <a:solidFill>
+            <a:schemeClr val="bg2"/>
+          </a:solidFill>
+          <a:ln w="9525">
+            <a:solidFill>
+              <a:schemeClr val="accent5"/>
+            </a:solidFill>
+            <a:prstDash val="solid"/>
+          </a:ln>
+        </p:spPr>
+      </p:sp>
+      <p:sp>
+        <p:nvSpPr>
+          <p:cNvPr id="13" name="Trouble title 4"/>
+          <p:cNvSpPr txBox="1"/>
+          <p:nvPr/>
+        </p:nvSpPr>
+        <p:spPr>
+          <a:xfrm>
+            <a:off x="685800" y="3895344"/>
+            <a:ext cx="2743200" cy="822960"/>
+          </a:xfrm>
+          <a:prstGeom prst="rect">
+            <a:avLst/>
+          </a:prstGeom>
+          <a:noFill/>
+          <a:ln/>
+        </p:spPr>
+        <p:txBody>
+          <a:bodyPr wrap="square" lIns="0" tIns="0" rIns="0" bIns="0" rtlCol="0" anchor="ctr"/>
+          <a:lstStyle/>
+          <a:p>
+            <a:pPr indent="0" marL="0">
+              <a:buNone/>
+            </a:pPr>
+            <a:r>
+              <a:rPr lang="en-US" sz="1500" b="1" dirty="0">
+                <a:solidFill>
+                  <a:schemeClr val="tx1"/>
+                </a:solidFill>
+              </a:rPr>
+              <a:t>멀티 모듈</a:t>
+            </a:r>
+            <a:endParaRPr lang="en-US" sz="1500" dirty="0"/>
+          </a:p>
+        </p:txBody>
+      </p:sp>
+      <p:sp>
+        <p:nvSpPr>
+          <p:cNvPr id="14" name="Trouble text 4"/>
+          <p:cNvSpPr txBox="1"/>
+          <p:nvPr/>
+        </p:nvSpPr>
+        <p:spPr>
+          <a:xfrm>
+            <a:off x="3566160" y="3895344"/>
+            <a:ext cx="4937760" cy="822960"/>
+          </a:xfrm>
+          <a:prstGeom prst="rect">
+            <a:avLst/>
+          </a:prstGeom>
+          <a:noFill/>
+          <a:ln/>
+        </p:spPr>
+        <p:txBody>
+          <a:bodyPr wrap="square" lIns="0" tIns="0" rIns="0" bIns="0" rtlCol="0" anchor="ctr"/>
+          <a:lstStyle/>
+          <a:p>
+            <a:pPr indent="0" marL="0">
+              <a:buNone/>
+            </a:pPr>
+            <a:r>
+              <a:rPr lang="en-US" sz="1300" dirty="0">
+                <a:solidFill>
+                  <a:schemeClr val="tx2"/>
+                </a:solidFill>
+              </a:rPr>
+              <a:t>부모 pom을 등록하면 &lt;modules&gt;의 하위 모듈이 Modules 폴더 아래에 함께 표시됩니다.</a:t>
+            </a:r>
+            <a:endParaRPr lang="en-US" sz="1300" dirty="0"/>
+          </a:p>
+        </p:txBody>
+      </p:sp>
+      <p:sp>
+        <p:nvSpPr>
+          <p:cNvPr id="25" name="Slide Number Placeholder 0"/>
+          <p:cNvSpPr>
+            <a:spLocks noGrp="1"/>
+          </p:cNvSpPr>
+          <p:nvPr>
+            <p:ph type="sldNum" sz="quarter" idx="4294967295"/>
+          </p:nvPr>
+        </p:nvSpPr>
+        <p:spPr>
+          <a:xfrm>
+            <a:off x="8412480" y="4800600"/>
+            <a:ext cx="457200" cy="228600"/>
+          </a:xfrm>
+          <a:prstGeom prst="rect">
+            <a:avLst/>
+          </a:prstGeom>
+          <a:extLst>
+            <a:ext uri="{C572A759-6A51-4108-AA02-DFA0A04FC94B}">
+              <ma14:wrappingTextBoxFlag xmlns:ma14="http://schemas.microsoft.com/office/mac/drawingml/2011/main" val="0"/>
+            </a:ext>
+          </a:extLst>
+        </p:spPr>
+        <p:txBody>
+          <a:bodyPr/>
+          <a:lstStyle>
+            <a:lvl1pPr>
+              <a:defRPr sz="1000">
+                <a:solidFill>
+                  <a:schemeClr val="accent6"/>
+                </a:solidFill>
+              </a:defRPr>
+            </a:lvl1pPr>
+          </a:lstStyle>
+          <a:p>
+            <a:pPr algn="r"/>
+            <a:fld id="{F7021451-1387-4CA6-816F-3879F97B5CBC}" type="slidenum">
+              <a:rPr b="0" lang="en-US"/>
+              <a:t>9</a:t>
+            </a:fld>
+            <a:endParaRPr lang="en-US"/>
+          </a:p>
+        </p:txBody>
+      </p:sp>
+    </p:spTree>
+  </p:cSld>
+  <p:clrMapOvr>
+    <a:masterClrMapping/>
+  </p:clrMapOvr>
+</p:sld>
+</file>
+
+<file path=ppt/slides/slide11.xml><?xml version="1.0" encoding="utf-8"?>
+<p:sld xmlns:a="http://schemas.openxmlformats.org/drawingml/2006/main" xmlns:p="http://schemas.openxmlformats.org/presentationml/2006/main" xmlns:r="http://schemas.openxmlformats.org/officeDocument/2006/relationships">
+  <p:cSld>
+    <p:spTree>
+      <p:nvGrpSpPr>
+        <p:cNvPr id="1" name=""/>
+        <p:cNvGrpSpPr/>
+        <p:nvPr/>
+      </p:nvGrpSpPr>
+      <p:grpSpPr/>
+      <p:sp>
+        <p:nvSpPr>
+          <p:cNvPr id="2" name="Title"/>
+          <p:cNvSpPr txBox="1"/>
+          <p:nvPr/>
+        </p:nvSpPr>
+        <p:spPr>
+          <a:xfrm>
+            <a:off x="457200" y="274320"/>
+            <a:ext cx="8229600" cy="640080"/>
+          </a:xfrm>
+          <a:prstGeom prst="rect">
+            <a:avLst/>
+          </a:prstGeom>
+          <a:noFill/>
+          <a:ln/>
+        </p:spPr>
+        <p:txBody>
+          <a:bodyPr wrap="square" lIns="0" tIns="0" rIns="0" bIns="0" rtlCol="0" anchor="ctr"/>
+          <a:lstStyle/>
+          <a:p>
+            <a:pPr indent="0" marL="0">
+              <a:buNone/>
+            </a:pPr>
+            <a:r>
+              <a:rPr lang="en-US" sz="3200" b="1" dirty="0">
+                <a:solidFill>
+                  <a:schemeClr val="tx1"/>
+                </a:solidFill>
+                <a:latin typeface="Cambria" pitchFamily="34" charset="0"/>
+                <a:ea typeface="Cambria" pitchFamily="34" charset="-122"/>
+                <a:cs typeface="Cambria" pitchFamily="34" charset="-120"/>
+              </a:rPr>
+              <a:t>상태 저장과 언어</a:t>
+            </a:r>
+            <a:endParaRPr lang="en-US" sz="3200" dirty="0"/>
+          </a:p>
+        </p:txBody>
+      </p:sp>
+      <p:sp>
+        <p:nvSpPr>
+          <p:cNvPr id="3" name="Trouble card 1"/>
+          <p:cNvSpPr/>
+          <p:nvPr/>
+        </p:nvSpPr>
+        <p:spPr>
+          <a:xfrm>
+            <a:off x="457200" y="1097280"/>
+            <a:ext cx="8229600" cy="822960"/>
+          </a:xfrm>
+          <a:prstGeom prst="roundRect">
+            <a:avLst>
+              <a:gd name="adj" fmla="val 8889"/>
+            </a:avLst>
+          </a:prstGeom>
+          <a:solidFill>
+            <a:schemeClr val="bg2"/>
+          </a:solidFill>
+          <a:ln w="9525">
+            <a:solidFill>
+              <a:schemeClr val="accent5"/>
+            </a:solidFill>
+            <a:prstDash val="solid"/>
+          </a:ln>
+        </p:spPr>
+      </p:sp>
+      <p:sp>
+        <p:nvSpPr>
+          <p:cNvPr id="4" name="Trouble title 1"/>
+          <p:cNvSpPr txBox="1"/>
+          <p:nvPr/>
+        </p:nvSpPr>
+        <p:spPr>
+          <a:xfrm>
+            <a:off x="685800" y="1097280"/>
+            <a:ext cx="2743200" cy="822960"/>
+          </a:xfrm>
+          <a:prstGeom prst="rect">
+            <a:avLst/>
+          </a:prstGeom>
+          <a:noFill/>
+          <a:ln/>
+        </p:spPr>
+        <p:txBody>
+          <a:bodyPr wrap="square" lIns="0" tIns="0" rIns="0" bIns="0" rtlCol="0" anchor="ctr"/>
+          <a:lstStyle/>
+          <a:p>
+            <a:pPr indent="0" marL="0">
+              <a:buNone/>
+            </a:pPr>
+            <a:r>
+              <a:rPr lang="en-US" sz="1500" b="1" dirty="0">
+                <a:solidFill>
+                  <a:schemeClr val="tx1"/>
+                </a:solidFill>
+              </a:rPr>
+              <a:t>상태 복원</a:t>
+            </a:r>
+            <a:endParaRPr lang="en-US" sz="1500" dirty="0"/>
+          </a:p>
+        </p:txBody>
+      </p:sp>
+      <p:sp>
+        <p:nvSpPr>
+          <p:cNvPr id="5" name="Trouble text 1"/>
+          <p:cNvSpPr txBox="1"/>
+          <p:nvPr/>
+        </p:nvSpPr>
+        <p:spPr>
+          <a:xfrm>
+            <a:off x="3566160" y="1097280"/>
+            <a:ext cx="4937760" cy="822960"/>
+          </a:xfrm>
+          <a:prstGeom prst="rect">
+            <a:avLst/>
+          </a:prstGeom>
+          <a:noFill/>
+          <a:ln/>
+        </p:spPr>
+        <p:txBody>
+          <a:bodyPr wrap="square" lIns="0" tIns="0" rIns="0" bIns="0" rtlCol="0" anchor="ctr"/>
+          <a:lstStyle/>
+          <a:p>
+            <a:pPr indent="0" marL="0">
+              <a:buNone/>
+            </a:pPr>
+            <a:r>
+              <a:rPr lang="en-US" sz="1300" dirty="0">
+                <a:solidFill>
+                  <a:schemeClr val="tx2"/>
+                </a:solidFill>
+              </a:rPr>
+              <a:t>등록한 pom, 트리 펼침 상태, 검색어, 즐겨찾기·최근 실행 목록이 Eclipse를 재시작해도 유지됩니다.</a:t>
+            </a:r>
+            <a:endParaRPr lang="en-US" sz="1300" dirty="0"/>
+          </a:p>
+        </p:txBody>
+      </p:sp>
+      <p:sp>
+        <p:nvSpPr>
+          <p:cNvPr id="6" name="Trouble card 2"/>
+          <p:cNvSpPr/>
+          <p:nvPr/>
+        </p:nvSpPr>
+        <p:spPr>
+          <a:xfrm>
+            <a:off x="457200" y="2029968"/>
+            <a:ext cx="8229600" cy="822960"/>
+          </a:xfrm>
+          <a:prstGeom prst="roundRect">
+            <a:avLst>
+              <a:gd name="adj" fmla="val 8889"/>
+            </a:avLst>
+          </a:prstGeom>
+          <a:solidFill>
+            <a:schemeClr val="bg2"/>
+          </a:solidFill>
+          <a:ln w="9525">
+            <a:solidFill>
+              <a:schemeClr val="accent5"/>
+            </a:solidFill>
+            <a:prstDash val="solid"/>
+          </a:ln>
+        </p:spPr>
+      </p:sp>
+      <p:sp>
+        <p:nvSpPr>
+          <p:cNvPr id="7" name="Trouble title 2"/>
+          <p:cNvSpPr txBox="1"/>
+          <p:nvPr/>
+        </p:nvSpPr>
+        <p:spPr>
+          <a:xfrm>
+            <a:off x="685800" y="2029968"/>
+            <a:ext cx="2743200" cy="822960"/>
+          </a:xfrm>
+          <a:prstGeom prst="rect">
+            <a:avLst/>
+          </a:prstGeom>
+          <a:noFill/>
+          <a:ln/>
+        </p:spPr>
+        <p:txBody>
+          <a:bodyPr wrap="square" lIns="0" tIns="0" rIns="0" bIns="0" rtlCol="0" anchor="ctr"/>
+          <a:lstStyle/>
+          <a:p>
+            <a:pPr indent="0" marL="0">
+              <a:buNone/>
+            </a:pPr>
+            <a:r>
+              <a:rPr lang="en-US" sz="1500" b="1" dirty="0">
+                <a:solidFill>
+                  <a:schemeClr val="tx1"/>
+                </a:solidFill>
+              </a:rPr>
+              <a:t>다국어 UI</a:t>
+            </a:r>
+            <a:endParaRPr lang="en-US" sz="1500" dirty="0"/>
+          </a:p>
+        </p:txBody>
+      </p:sp>
+      <p:sp>
+        <p:nvSpPr>
+          <p:cNvPr id="8" name="Trouble text 2"/>
+          <p:cNvSpPr txBox="1"/>
+          <p:nvPr/>
+        </p:nvSpPr>
+        <p:spPr>
+          <a:xfrm>
+            <a:off x="3566160" y="2029968"/>
+            <a:ext cx="4937760" cy="822960"/>
+          </a:xfrm>
+          <a:prstGeom prst="rect">
+            <a:avLst/>
+          </a:prstGeom>
+          <a:noFill/>
+          <a:ln/>
+        </p:spPr>
+        <p:txBody>
+          <a:bodyPr wrap="square" lIns="0" tIns="0" rIns="0" bIns="0" rtlCol="0" anchor="ctr"/>
+          <a:lstStyle/>
+          <a:p>
+            <a:pPr indent="0" marL="0">
+              <a:buNone/>
+            </a:pPr>
+            <a:r>
+              <a:rPr lang="en-US" sz="1300" dirty="0">
+                <a:solidFill>
+                  <a:schemeClr val="tx2"/>
+                </a:solidFill>
+              </a:rPr>
+              <a:t>기본 영어. Eclipse를 한국어·일본어·중국어(간체) 환경(-nl ko / ja / zh)으로 실행하면 해당 언어로 표시됩니다.</a:t>
+            </a:r>
+            <a:endParaRPr lang="en-US" sz="1300" dirty="0"/>
+          </a:p>
+        </p:txBody>
+      </p:sp>
+      <p:sp>
+        <p:nvSpPr>
+          <p:cNvPr id="25" name="Slide Number Placeholder 0"/>
+          <p:cNvSpPr>
+            <a:spLocks noGrp="1"/>
+          </p:cNvSpPr>
+          <p:nvPr>
+            <p:ph type="sldNum" sz="quarter" idx="4294967295"/>
+          </p:nvPr>
+        </p:nvSpPr>
+        <p:spPr>
+          <a:xfrm>
+            <a:off x="8412480" y="4800600"/>
+            <a:ext cx="457200" cy="228600"/>
+          </a:xfrm>
+          <a:prstGeom prst="rect">
+            <a:avLst/>
+          </a:prstGeom>
+          <a:extLst>
+            <a:ext uri="{C572A759-6A51-4108-AA02-DFA0A04FC94B}">
+              <ma14:wrappingTextBoxFlag xmlns:ma14="http://schemas.microsoft.com/office/mac/drawingml/2011/main" val="0"/>
+            </a:ext>
+          </a:extLst>
+        </p:spPr>
+        <p:txBody>
+          <a:bodyPr/>
+          <a:lstStyle>
+            <a:lvl1pPr>
+              <a:defRPr sz="1000">
+                <a:solidFill>
+                  <a:schemeClr val="accent6"/>
+                </a:solidFill>
+              </a:defRPr>
+            </a:lvl1pPr>
+          </a:lstStyle>
+          <a:p>
+            <a:pPr algn="r"/>
+            <a:fld id="{F7021451-1387-4CA6-816F-3879F97B5CBC}" type="slidenum">
+              <a:rPr b="0" lang="en-US"/>
+              <a:t>9</a:t>
+            </a:fld>
+            <a:endParaRPr lang="en-US"/>
+          </a:p>
+        </p:txBody>
+      </p:sp>
+    </p:spTree>
+  </p:cSld>
+  <p:clrMapOvr>
+    <a:masterClrMapping/>
+  </p:clrMapOvr>
+</p:sld>
+</file>
+
 <file path=ppt/slides/slide2.xml><?xml version="1.0" encoding="utf-8"?>
 <p:sld xmlns:a="http://schemas.openxmlformats.org/drawingml/2006/main" xmlns:r="http://schemas.openxmlformats.org/officeDocument/2006/relationships" xmlns:p="http://schemas.openxmlformats.org/presentationml/2006/main">
   <p:cSld name="Slide 2">
@@ -2615,7 +3415,7 @@
                   <a:schemeClr val="tx2"/>
                 </a:solidFill>
               </a:rPr>
-              <a:t>사전 조건: Java 21 이상 · m2e(Maven Integration for Eclipse) 설치</a:t>
+              <a:t>사전 조건: Java 17 이상 · m2e(Maven Integration for Eclipse) 설치</a:t>
             </a:r>
             <a:endParaRPr lang="en-US" sz="1400" dirty="0"/>
           </a:p>

--- a/dist/KCube-Maven-Goals-매뉴얼.pptx
+++ b/dist/KCube-Maven-Goals-매뉴얼.pptx
@@ -13,6 +13,7 @@
     <p:sldId id="261" r:id="rId7"/>
     <p:sldId id="262" r:id="rId8"/>
     <p:sldId id="263" r:id="rId9"/>
+    <p:sldId id="267" r:id="rId18"/>
     <p:sldId id="265" r:id="rId16"/>
     <p:sldId id="266" r:id="rId17"/>
     <p:sldId id="264" r:id="rId10"/>
@@ -1961,7 +1962,7 @@
                 <a:ea typeface="Cambria" pitchFamily="34" charset="-122"/>
                 <a:cs typeface="Cambria" pitchFamily="34" charset="-120"/>
               </a:rPr>
-              <a:t>편의 기능</a:t>
+              <a:t>상태 저장과 언어</a:t>
             </a:r>
             <a:endParaRPr lang="en-US" sz="3200" dirty="0"/>
           </a:p>
@@ -2024,7 +2025,7 @@
                   <a:schemeClr val="tx1"/>
                 </a:solidFill>
               </a:rPr>
-              <a:t>Goal 검색</a:t>
+              <a:t>상태 복원</a:t>
             </a:r>
             <a:endParaRPr lang="en-US" sz="1500" dirty="0"/>
           </a:p>
@@ -2060,7 +2061,7 @@
                   <a:schemeClr val="tx2"/>
                 </a:solidFill>
               </a:rPr>
-              <a:t>트리 위 검색창에 키워드를 입력하면 일치하는 goal만 표시됩니다. Esc로 해제합니다.</a:t>
+              <a:t>등록한 pom, 트리 펼침 상태, 검색어, 즐겨찾기·최근 실행 목록이 Eclipse를 재시작해도 유지됩니다.</a:t>
             </a:r>
             <a:endParaRPr lang="en-US" sz="1300" dirty="0"/>
           </a:p>
@@ -2123,7 +2124,7 @@
                   <a:schemeClr val="tx1"/>
                 </a:solidFill>
               </a:rPr>
-              <a:t>즐겨찾기 / 최근 실행</a:t>
+              <a:t>다국어 UI</a:t>
             </a:r>
             <a:endParaRPr lang="en-US" sz="1500" dirty="0"/>
           </a:p>
@@ -2159,7 +2160,7 @@
                   <a:schemeClr val="tx2"/>
                 </a:solidFill>
               </a:rPr>
-              <a:t>우클릭 → Add to Favorites(★). 툴바 드롭다운에서 즐겨찾기와 최근 실행 10개를 바로 실행합니다.</a:t>
+              <a:t>기본 영어. Eclipse를 한국어·일본어·중국어(간체) 환경(-nl ko / ja / zh)으로 실행하면 해당 언어로 표시됩니다.</a:t>
             </a:r>
             <a:endParaRPr lang="en-US" sz="1300" dirty="0"/>
           </a:p>
@@ -2167,13 +2168,122 @@
       </p:sp>
       <p:sp>
         <p:nvSpPr>
-          <p:cNvPr id="9" name="Trouble card 3"/>
+          <p:cNvPr id="25" name="Slide Number Placeholder 0"/>
+          <p:cNvSpPr>
+            <a:spLocks noGrp="1"/>
+          </p:cNvSpPr>
+          <p:nvPr>
+            <p:ph type="sldNum" sz="quarter" idx="4294967295"/>
+          </p:nvPr>
+        </p:nvSpPr>
+        <p:spPr>
+          <a:xfrm>
+            <a:off x="8412480" y="4800600"/>
+            <a:ext cx="457200" cy="228600"/>
+          </a:xfrm>
+          <a:prstGeom prst="rect">
+            <a:avLst/>
+          </a:prstGeom>
+          <a:extLst>
+            <a:ext uri="{C572A759-6A51-4108-AA02-DFA0A04FC94B}">
+              <ma14:wrappingTextBoxFlag xmlns:ma14="http://schemas.microsoft.com/office/mac/drawingml/2011/main" val="0"/>
+            </a:ext>
+          </a:extLst>
+        </p:spPr>
+        <p:txBody>
+          <a:bodyPr/>
+          <a:lstStyle>
+            <a:lvl1pPr>
+              <a:defRPr sz="1000">
+                <a:solidFill>
+                  <a:schemeClr val="accent6"/>
+                </a:solidFill>
+              </a:defRPr>
+            </a:lvl1pPr>
+          </a:lstStyle>
+          <a:p>
+            <a:pPr algn="r"/>
+            <a:fld id="{F7021451-1387-4CA6-816F-3879F97B5CBC}" type="slidenum">
+              <a:rPr b="0" lang="en-US"/>
+              <a:t>9</a:t>
+            </a:fld>
+            <a:endParaRPr lang="en-US"/>
+          </a:p>
+        </p:txBody>
+      </p:sp>
+    </p:spTree>
+  </p:cSld>
+  <p:clrMapOvr>
+    <a:masterClrMapping/>
+  </p:clrMapOvr>
+</p:sld>
+</file>
+
+<file path=ppt/slides/slide11.xml><?xml version="1.0" encoding="utf-8"?>
+<p:sld xmlns:a="http://schemas.openxmlformats.org/drawingml/2006/main" xmlns:r="http://schemas.openxmlformats.org/officeDocument/2006/relationships" xmlns:p="http://schemas.openxmlformats.org/presentationml/2006/main">
+  <p:cSld name="Slide 9">
+    <p:spTree>
+      <p:nvGrpSpPr>
+        <p:cNvPr id="1" name=""/>
+        <p:cNvGrpSpPr/>
+        <p:nvPr/>
+      </p:nvGrpSpPr>
+      <p:grpSpPr>
+        <a:xfrm>
+          <a:off x="0" y="0"/>
+          <a:ext cx="0" cy="0"/>
+          <a:chOff x="0" y="0"/>
+          <a:chExt cx="0" cy="0"/>
+        </a:xfrm>
+      </p:grpSpPr>
+      <p:sp>
+        <p:nvSpPr>
+          <p:cNvPr id="2" name="Title"/>
+          <p:cNvSpPr txBox="1"/>
+          <p:nvPr/>
+        </p:nvSpPr>
+        <p:spPr>
+          <a:xfrm>
+            <a:off x="457200" y="274320"/>
+            <a:ext cx="8229600" cy="640080"/>
+          </a:xfrm>
+          <a:prstGeom prst="rect">
+            <a:avLst/>
+          </a:prstGeom>
+          <a:noFill/>
+          <a:ln/>
+        </p:spPr>
+        <p:txBody>
+          <a:bodyPr wrap="square" lIns="0" tIns="0" rIns="0" bIns="0" rtlCol="0" anchor="ctr"/>
+          <a:lstStyle/>
+          <a:p>
+            <a:pPr indent="0" marL="0">
+              <a:buNone/>
+            </a:pPr>
+            <a:r>
+              <a:rPr lang="en-US" sz="3200" b="1" dirty="0">
+                <a:solidFill>
+                  <a:schemeClr val="tx1"/>
+                </a:solidFill>
+                <a:latin typeface="Cambria" pitchFamily="34" charset="0"/>
+                <a:ea typeface="Cambria" pitchFamily="34" charset="-122"/>
+                <a:cs typeface="Cambria" pitchFamily="34" charset="-120"/>
+              </a:rPr>
+              <a:t>문제 해결</a:t>
+            </a:r>
+            <a:endParaRPr lang="en-US" sz="3200" dirty="0"/>
+          </a:p>
+        </p:txBody>
+      </p:sp>
+      <p:sp>
+        <p:nvSpPr>
+          <p:cNvPr id="3" name="Trouble card 1"/>
           <p:cNvSpPr/>
           <p:nvPr/>
         </p:nvSpPr>
         <p:spPr>
           <a:xfrm>
-            <a:off x="457200" y="2962656"/>
+            <a:off x="457200" y="1097280"/>
             <a:ext cx="8229600" cy="822960"/>
           </a:xfrm>
           <a:prstGeom prst="roundRect">
@@ -2194,13 +2304,13 @@
       </p:sp>
       <p:sp>
         <p:nvSpPr>
-          <p:cNvPr id="10" name="Trouble title 3"/>
-          <p:cNvSpPr txBox="1"/>
-          <p:nvPr/>
-        </p:nvSpPr>
-        <p:spPr>
-          <a:xfrm>
-            <a:off x="685800" y="2962656"/>
+          <p:cNvPr id="4" name="Trouble title 1"/>
+          <p:cNvSpPr txBox="1"/>
+          <p:nvPr/>
+        </p:nvSpPr>
+        <p:spPr>
+          <a:xfrm>
+            <a:off x="685800" y="1097280"/>
             <a:ext cx="2743200" cy="822960"/>
           </a:xfrm>
           <a:prstGeom prst="rect">
@@ -2222,7 +2332,7 @@
                   <a:schemeClr val="tx1"/>
                 </a:solidFill>
               </a:rPr>
-              <a:t>Run with Options…</a:t>
+              <a:t>뷰가 비어 있음</a:t>
             </a:r>
             <a:endParaRPr lang="en-US" sz="1500" dirty="0"/>
           </a:p>
@@ -2230,13 +2340,13 @@
       </p:sp>
       <p:sp>
         <p:nvSpPr>
-          <p:cNvPr id="11" name="Trouble text 3"/>
-          <p:cNvSpPr txBox="1"/>
-          <p:nvPr/>
-        </p:nvSpPr>
-        <p:spPr>
-          <a:xfrm>
-            <a:off x="3566160" y="2962656"/>
+          <p:cNvPr id="5" name="Trouble text 1"/>
+          <p:cNvSpPr txBox="1"/>
+          <p:nvPr/>
+        </p:nvSpPr>
+        <p:spPr>
+          <a:xfrm>
+            <a:off x="3566160" y="1097280"/>
             <a:ext cx="4937760" cy="822960"/>
           </a:xfrm>
           <a:prstGeom prst="rect">
@@ -2258,7 +2368,7 @@
                   <a:schemeClr val="tx2"/>
                 </a:solidFill>
               </a:rPr>
-              <a:t>우클릭 → goal 수정, 프로파일(-P), -DskipTests, -o, -U, 추가 인자를 지정해 실행합니다.</a:t>
+              <a:t>등록된 pom.xml이 없는 상태입니다. 드래그 앤 드롭이나 Add 버튼으로 등록하세요.</a:t>
             </a:r>
             <a:endParaRPr lang="en-US" sz="1300" dirty="0"/>
           </a:p>
@@ -2266,13 +2376,13 @@
       </p:sp>
       <p:sp>
         <p:nvSpPr>
-          <p:cNvPr id="12" name="Trouble card 4"/>
+          <p:cNvPr id="6" name="Trouble card 2"/>
           <p:cNvSpPr/>
           <p:nvPr/>
         </p:nvSpPr>
         <p:spPr>
           <a:xfrm>
-            <a:off x="457200" y="3895344"/>
+            <a:off x="457200" y="2029968"/>
             <a:ext cx="8229600" cy="822960"/>
           </a:xfrm>
           <a:prstGeom prst="roundRect">
@@ -2293,6 +2403,204 @@
       </p:sp>
       <p:sp>
         <p:nvSpPr>
+          <p:cNvPr id="7" name="Trouble title 2"/>
+          <p:cNvSpPr txBox="1"/>
+          <p:nvPr/>
+        </p:nvSpPr>
+        <p:spPr>
+          <a:xfrm>
+            <a:off x="685800" y="2029968"/>
+            <a:ext cx="2743200" cy="822960"/>
+          </a:xfrm>
+          <a:prstGeom prst="rect">
+            <a:avLst/>
+          </a:prstGeom>
+          <a:noFill/>
+          <a:ln/>
+        </p:spPr>
+        <p:txBody>
+          <a:bodyPr wrap="square" lIns="0" tIns="0" rIns="0" bIns="0" rtlCol="0" anchor="ctr"/>
+          <a:lstStyle/>
+          <a:p>
+            <a:pPr indent="0" marL="0">
+              <a:buNone/>
+            </a:pPr>
+            <a:r>
+              <a:rPr lang="en-US" sz="1500" b="1" dirty="0">
+                <a:solidFill>
+                  <a:schemeClr val="tx1"/>
+                </a:solidFill>
+              </a:rPr>
+              <a:t>mvn을 찾을 수 없음</a:t>
+            </a:r>
+            <a:endParaRPr lang="en-US" sz="1500" dirty="0"/>
+          </a:p>
+        </p:txBody>
+      </p:sp>
+      <p:sp>
+        <p:nvSpPr>
+          <p:cNvPr id="8" name="Trouble text 2"/>
+          <p:cNvSpPr txBox="1"/>
+          <p:nvPr/>
+        </p:nvSpPr>
+        <p:spPr>
+          <a:xfrm>
+            <a:off x="3566160" y="2029968"/>
+            <a:ext cx="4937760" cy="822960"/>
+          </a:xfrm>
+          <a:prstGeom prst="rect">
+            <a:avLst/>
+          </a:prstGeom>
+          <a:noFill/>
+          <a:ln/>
+        </p:spPr>
+        <p:txBody>
+          <a:bodyPr wrap="square" lIns="0" tIns="0" rIns="0" bIns="0" rtlCol="0" anchor="ctr"/>
+          <a:lstStyle/>
+          <a:p>
+            <a:pPr indent="0" marL="0">
+              <a:buNone/>
+            </a:pPr>
+            <a:r>
+              <a:rPr lang="en-US" sz="1300" dirty="0">
+                <a:solidFill>
+                  <a:schemeClr val="tx2"/>
+                </a:solidFill>
+              </a:rPr>
+              <a:t>mvn 체크박스를 해제해 내장 Maven을 쓰거나, 터미널에서 mvn -v로 설치를 확인하세요.</a:t>
+            </a:r>
+            <a:endParaRPr lang="en-US" sz="1300" dirty="0"/>
+          </a:p>
+        </p:txBody>
+      </p:sp>
+      <p:sp>
+        <p:nvSpPr>
+          <p:cNvPr id="9" name="Trouble card 3"/>
+          <p:cNvSpPr/>
+          <p:nvPr/>
+        </p:nvSpPr>
+        <p:spPr>
+          <a:xfrm>
+            <a:off x="457200" y="2962656"/>
+            <a:ext cx="8229600" cy="822960"/>
+          </a:xfrm>
+          <a:prstGeom prst="roundRect">
+            <a:avLst>
+              <a:gd name="adj" fmla="val 8889"/>
+            </a:avLst>
+          </a:prstGeom>
+          <a:solidFill>
+            <a:schemeClr val="bg2"/>
+          </a:solidFill>
+          <a:ln w="9525">
+            <a:solidFill>
+              <a:schemeClr val="accent5"/>
+            </a:solidFill>
+            <a:prstDash val="solid"/>
+          </a:ln>
+        </p:spPr>
+      </p:sp>
+      <p:sp>
+        <p:nvSpPr>
+          <p:cNvPr id="10" name="Trouble title 3"/>
+          <p:cNvSpPr txBox="1"/>
+          <p:nvPr/>
+        </p:nvSpPr>
+        <p:spPr>
+          <a:xfrm>
+            <a:off x="685800" y="2962656"/>
+            <a:ext cx="2743200" cy="822960"/>
+          </a:xfrm>
+          <a:prstGeom prst="rect">
+            <a:avLst/>
+          </a:prstGeom>
+          <a:noFill/>
+          <a:ln/>
+        </p:spPr>
+        <p:txBody>
+          <a:bodyPr wrap="square" lIns="0" tIns="0" rIns="0" bIns="0" rtlCol="0" anchor="ctr"/>
+          <a:lstStyle/>
+          <a:p>
+            <a:pPr indent="0" marL="0">
+              <a:buNone/>
+            </a:pPr>
+            <a:r>
+              <a:rPr lang="en-US" sz="1500" b="1" dirty="0">
+                <a:solidFill>
+                  <a:schemeClr val="tx1"/>
+                </a:solidFill>
+              </a:rPr>
+              <a:t>업데이트가 반영되지 않음</a:t>
+            </a:r>
+            <a:endParaRPr lang="en-US" sz="1500" dirty="0"/>
+          </a:p>
+        </p:txBody>
+      </p:sp>
+      <p:sp>
+        <p:nvSpPr>
+          <p:cNvPr id="11" name="Trouble text 3"/>
+          <p:cNvSpPr txBox="1"/>
+          <p:nvPr/>
+        </p:nvSpPr>
+        <p:spPr>
+          <a:xfrm>
+            <a:off x="3566160" y="2962656"/>
+            <a:ext cx="4937760" cy="822960"/>
+          </a:xfrm>
+          <a:prstGeom prst="rect">
+            <a:avLst/>
+          </a:prstGeom>
+          <a:noFill/>
+          <a:ln/>
+        </p:spPr>
+        <p:txBody>
+          <a:bodyPr wrap="square" lIns="0" tIns="0" rIns="0" bIns="0" rtlCol="0" anchor="ctr"/>
+          <a:lstStyle/>
+          <a:p>
+            <a:pPr indent="0" marL="0">
+              <a:buNone/>
+            </a:pPr>
+            <a:r>
+              <a:rPr lang="en-US" sz="1300" dirty="0">
+                <a:solidFill>
+                  <a:schemeClr val="tx2"/>
+                </a:solidFill>
+              </a:rPr>
+              <a:t>dropins 안에 같은 플러그인이 둘 이상이면 옛 jar가 로드됩니다. 하나만 남기고 -clean으로 재실행하세요.</a:t>
+            </a:r>
+            <a:endParaRPr lang="en-US" sz="1300" dirty="0"/>
+          </a:p>
+        </p:txBody>
+      </p:sp>
+      <p:sp>
+        <p:nvSpPr>
+          <p:cNvPr id="12" name="Trouble card 4"/>
+          <p:cNvSpPr/>
+          <p:nvPr/>
+        </p:nvSpPr>
+        <p:spPr>
+          <a:xfrm>
+            <a:off x="457200" y="3895344"/>
+            <a:ext cx="8229600" cy="822960"/>
+          </a:xfrm>
+          <a:prstGeom prst="roundRect">
+            <a:avLst>
+              <a:gd name="adj" fmla="val 8889"/>
+            </a:avLst>
+          </a:prstGeom>
+          <a:solidFill>
+            <a:schemeClr val="bg2"/>
+          </a:solidFill>
+          <a:ln w="9525">
+            <a:solidFill>
+              <a:schemeClr val="accent5"/>
+            </a:solidFill>
+            <a:prstDash val="solid"/>
+          </a:ln>
+        </p:spPr>
+      </p:sp>
+      <p:sp>
+        <p:nvSpPr>
           <p:cNvPr id="13" name="Trouble title 4"/>
           <p:cNvSpPr txBox="1"/>
           <p:nvPr/>
@@ -2321,7 +2629,7 @@
                   <a:schemeClr val="tx1"/>
                 </a:solidFill>
               </a:rPr>
-              <a:t>멀티 모듈</a:t>
+              <a:t>플러그인이 보이지 않음</a:t>
             </a:r>
             <a:endParaRPr lang="en-US" sz="1500" dirty="0"/>
           </a:p>
@@ -2357,7 +2665,7 @@
                   <a:schemeClr val="tx2"/>
                 </a:solidFill>
               </a:rPr>
-              <a:t>부모 pom을 등록하면 &lt;modules&gt;의 하위 모듈이 Modules 폴더 아래에 함께 표시됩니다.</a:t>
+              <a:t>Eclipse를 완전히 종료한 뒤 -clean으로 재실행해야 합니다. 같은 워크스페이스의 다른 인스턴스가 떠 있으면 무시됩니다.</a:t>
             </a:r>
             <a:endParaRPr lang="en-US" sz="1300" dirty="0"/>
           </a:p>
@@ -2416,7 +2724,7 @@
 </p:sld>
 </file>
 
-<file path=ppt/slides/slide11.xml><?xml version="1.0" encoding="utf-8"?>
+<file path=ppt/slides/slide12.xml><?xml version="1.0" encoding="utf-8"?>
 <p:sld xmlns:a="http://schemas.openxmlformats.org/drawingml/2006/main" xmlns:p="http://schemas.openxmlformats.org/presentationml/2006/main" xmlns:r="http://schemas.openxmlformats.org/officeDocument/2006/relationships">
   <p:cSld>
     <p:spTree>
@@ -2459,7 +2767,7 @@
                 <a:ea typeface="Cambria" pitchFamily="34" charset="-122"/>
                 <a:cs typeface="Cambria" pitchFamily="34" charset="-120"/>
               </a:rPr>
-              <a:t>상태 저장과 언어</a:t>
+              <a:t>최신 화면: 툴바와 검색창</a:t>
             </a:r>
             <a:endParaRPr lang="en-US" sz="3200" dirty="0"/>
           </a:p>
@@ -2467,199 +2775,151 @@
       </p:sp>
       <p:sp>
         <p:nvSpPr>
-          <p:cNvPr id="3" name="Trouble card 1"/>
-          <p:cNvSpPr/>
-          <p:nvPr/>
-        </p:nvSpPr>
-        <p:spPr>
-          <a:xfrm>
-            <a:off x="457200" y="1097280"/>
-            <a:ext cx="8229600" cy="822960"/>
-          </a:xfrm>
-          <a:prstGeom prst="roundRect">
-            <a:avLst>
-              <a:gd name="adj" fmla="val 8889"/>
-            </a:avLst>
-          </a:prstGeom>
-          <a:solidFill>
-            <a:schemeClr val="bg2"/>
-          </a:solidFill>
-          <a:ln w="9525">
-            <a:solidFill>
-              <a:schemeClr val="accent5"/>
-            </a:solidFill>
-            <a:prstDash val="solid"/>
-          </a:ln>
-        </p:spPr>
-      </p:sp>
-      <p:sp>
-        <p:nvSpPr>
-          <p:cNvPr id="4" name="Trouble title 1"/>
-          <p:cNvSpPr txBox="1"/>
-          <p:nvPr/>
-        </p:nvSpPr>
-        <p:spPr>
-          <a:xfrm>
-            <a:off x="685800" y="1097280"/>
-            <a:ext cx="2743200" cy="822960"/>
-          </a:xfrm>
-          <a:prstGeom prst="rect">
-            <a:avLst/>
-          </a:prstGeom>
-          <a:noFill/>
-          <a:ln/>
-        </p:spPr>
-        <p:txBody>
-          <a:bodyPr wrap="square" lIns="0" tIns="0" rIns="0" bIns="0" rtlCol="0" anchor="ctr"/>
-          <a:lstStyle/>
-          <a:p>
-            <a:pPr indent="0" marL="0">
-              <a:buNone/>
-            </a:pPr>
-            <a:r>
-              <a:rPr lang="en-US" sz="1500" b="1" dirty="0">
+          <p:cNvPr id="4" name="Plugin point 1"/>
+          <p:cNvSpPr txBox="1"/>
+          <p:nvPr/>
+        </p:nvSpPr>
+        <p:spPr>
+          <a:xfrm>
+            <a:off x="5486400" y="1143000"/>
+            <a:ext cx="3200400" cy="1051560"/>
+          </a:xfrm>
+          <a:prstGeom prst="rect">
+            <a:avLst/>
+          </a:prstGeom>
+          <a:noFill/>
+          <a:ln/>
+        </p:spPr>
+        <p:txBody>
+          <a:bodyPr wrap="square" lIns="0" tIns="0" rIns="0" bIns="0" rtlCol="0" anchor="t"/>
+          <a:lstStyle/>
+          <a:p>
+            <a:pPr indent="0" marL="0">
+              <a:buNone/>
+            </a:pPr>
+            <a:r>
+              <a:rPr lang="en-US" sz="1600" b="1" dirty="0">
                 <a:solidFill>
                   <a:schemeClr val="tx1"/>
                 </a:solidFill>
               </a:rPr>
-              <a:t>상태 복원</a:t>
-            </a:r>
-            <a:endParaRPr lang="en-US" sz="1500" dirty="0"/>
-          </a:p>
-        </p:txBody>
-      </p:sp>
-      <p:sp>
-        <p:nvSpPr>
-          <p:cNvPr id="5" name="Trouble text 1"/>
-          <p:cNvSpPr txBox="1"/>
-          <p:nvPr/>
-        </p:nvSpPr>
-        <p:spPr>
-          <a:xfrm>
-            <a:off x="3566160" y="1097280"/>
-            <a:ext cx="4937760" cy="822960"/>
-          </a:xfrm>
-          <a:prstGeom prst="rect">
-            <a:avLst/>
-          </a:prstGeom>
-          <a:noFill/>
-          <a:ln/>
-        </p:spPr>
-        <p:txBody>
-          <a:bodyPr wrap="square" lIns="0" tIns="0" rIns="0" bIns="0" rtlCol="0" anchor="ctr"/>
-          <a:lstStyle/>
-          <a:p>
-            <a:pPr indent="0" marL="0">
-              <a:buNone/>
-            </a:pPr>
-            <a:r>
-              <a:rPr lang="en-US" sz="1300" dirty="0">
+              <a:t>툴바</a:t>
+            </a:r>
+            <a:endParaRPr lang="en-US" sz="1600" dirty="0"/>
+          </a:p>
+          <a:p>
+            <a:pPr indent="0" marL="0">
+              <a:buNone/>
+            </a:pPr>
+            <a:r>
+              <a:rPr lang="en-US" sz="1400" dirty="0">
                 <a:solidFill>
                   <a:schemeClr val="tx2"/>
                 </a:solidFill>
               </a:rPr>
-              <a:t>등록한 pom, 트리 펼침 상태, 검색어, 즐겨찾기·최근 실행 목록이 Eclipse를 재시작해도 유지됩니다.</a:t>
-            </a:r>
-            <a:endParaRPr lang="en-US" sz="1300" dirty="0"/>
-          </a:p>
-        </p:txBody>
-      </p:sp>
-      <p:sp>
-        <p:nvSpPr>
-          <p:cNvPr id="6" name="Trouble card 2"/>
-          <p:cNvSpPr/>
-          <p:nvPr/>
-        </p:nvSpPr>
-        <p:spPr>
-          <a:xfrm>
-            <a:off x="457200" y="2029968"/>
-            <a:ext cx="8229600" cy="822960"/>
-          </a:xfrm>
-          <a:prstGeom prst="roundRect">
-            <a:avLst>
-              <a:gd name="adj" fmla="val 8889"/>
-            </a:avLst>
-          </a:prstGeom>
-          <a:solidFill>
-            <a:schemeClr val="bg2"/>
-          </a:solidFill>
-          <a:ln w="9525">
-            <a:solidFill>
-              <a:schemeClr val="accent5"/>
-            </a:solidFill>
-            <a:prstDash val="solid"/>
-          </a:ln>
-        </p:spPr>
-      </p:sp>
-      <p:sp>
-        <p:nvSpPr>
-          <p:cNvPr id="7" name="Trouble title 2"/>
-          <p:cNvSpPr txBox="1"/>
-          <p:nvPr/>
-        </p:nvSpPr>
-        <p:spPr>
-          <a:xfrm>
-            <a:off x="685800" y="2029968"/>
-            <a:ext cx="2743200" cy="822960"/>
-          </a:xfrm>
-          <a:prstGeom prst="rect">
-            <a:avLst/>
-          </a:prstGeom>
-          <a:noFill/>
-          <a:ln/>
-        </p:spPr>
-        <p:txBody>
-          <a:bodyPr wrap="square" lIns="0" tIns="0" rIns="0" bIns="0" rtlCol="0" anchor="ctr"/>
-          <a:lstStyle/>
-          <a:p>
-            <a:pPr indent="0" marL="0">
-              <a:buNone/>
-            </a:pPr>
-            <a:r>
-              <a:rPr lang="en-US" sz="1500" b="1" dirty="0">
+              <a:t>mvn 체크박스 · Run · 즐겨찾기/최근 실행(ⁱ▾) · Update · 등록/제거/새로고침 · 펼치기/접기</a:t>
+            </a:r>
+            <a:endParaRPr lang="en-US" sz="1600" dirty="0"/>
+          </a:p>
+        </p:txBody>
+      </p:sp>
+      <p:sp>
+        <p:nvSpPr>
+          <p:cNvPr id="5" name="Plugin point 2"/>
+          <p:cNvSpPr txBox="1"/>
+          <p:nvPr/>
+        </p:nvSpPr>
+        <p:spPr>
+          <a:xfrm>
+            <a:off x="5486400" y="2331720"/>
+            <a:ext cx="3200400" cy="1051560"/>
+          </a:xfrm>
+          <a:prstGeom prst="rect">
+            <a:avLst/>
+          </a:prstGeom>
+          <a:noFill/>
+          <a:ln/>
+        </p:spPr>
+        <p:txBody>
+          <a:bodyPr wrap="square" lIns="0" tIns="0" rIns="0" bIns="0" rtlCol="0" anchor="t"/>
+          <a:lstStyle/>
+          <a:p>
+            <a:pPr indent="0" marL="0">
+              <a:buNone/>
+            </a:pPr>
+            <a:r>
+              <a:rPr lang="en-US" sz="1600" b="1" dirty="0">
                 <a:solidFill>
                   <a:schemeClr val="tx1"/>
                 </a:solidFill>
               </a:rPr>
-              <a:t>다국어 UI</a:t>
-            </a:r>
-            <a:endParaRPr lang="en-US" sz="1500" dirty="0"/>
-          </a:p>
-        </p:txBody>
-      </p:sp>
-      <p:sp>
-        <p:nvSpPr>
-          <p:cNvPr id="8" name="Trouble text 2"/>
-          <p:cNvSpPr txBox="1"/>
-          <p:nvPr/>
-        </p:nvSpPr>
-        <p:spPr>
-          <a:xfrm>
-            <a:off x="3566160" y="2029968"/>
-            <a:ext cx="4937760" cy="822960"/>
-          </a:xfrm>
-          <a:prstGeom prst="rect">
-            <a:avLst/>
-          </a:prstGeom>
-          <a:noFill/>
-          <a:ln/>
-        </p:spPr>
-        <p:txBody>
-          <a:bodyPr wrap="square" lIns="0" tIns="0" rIns="0" bIns="0" rtlCol="0" anchor="ctr"/>
-          <a:lstStyle/>
-          <a:p>
-            <a:pPr indent="0" marL="0">
-              <a:buNone/>
-            </a:pPr>
-            <a:r>
-              <a:rPr lang="en-US" sz="1300" dirty="0">
+              <a:t>Goal 필터</a:t>
+            </a:r>
+            <a:endParaRPr lang="en-US" sz="1600" dirty="0"/>
+          </a:p>
+          <a:p>
+            <a:pPr indent="0" marL="0">
+              <a:buNone/>
+            </a:pPr>
+            <a:r>
+              <a:rPr lang="en-US" sz="1400" dirty="0">
                 <a:solidFill>
                   <a:schemeClr val="tx2"/>
                 </a:solidFill>
               </a:rPr>
-              <a:t>기본 영어. Eclipse를 한국어·일본어·중국어(간체) 환경(-nl ko / ja / zh)으로 실행하면 해당 언어로 표시됩니다.</a:t>
-            </a:r>
-            <a:endParaRPr lang="en-US" sz="1300" dirty="0"/>
+              <a:t>검색창에 키워드를 입력하면 일치하는 goal만 표시됩니다. Esc로 해제합니다.</a:t>
+            </a:r>
+            <a:endParaRPr lang="en-US" sz="1600" dirty="0"/>
+          </a:p>
+        </p:txBody>
+      </p:sp>
+      <p:sp>
+        <p:nvSpPr>
+          <p:cNvPr id="6" name="Plugin point 3"/>
+          <p:cNvSpPr txBox="1"/>
+          <p:nvPr/>
+        </p:nvSpPr>
+        <p:spPr>
+          <a:xfrm>
+            <a:off x="5486400" y="3520440"/>
+            <a:ext cx="3200400" cy="1051560"/>
+          </a:xfrm>
+          <a:prstGeom prst="rect">
+            <a:avLst/>
+          </a:prstGeom>
+          <a:noFill/>
+          <a:ln/>
+        </p:spPr>
+        <p:txBody>
+          <a:bodyPr wrap="square" lIns="0" tIns="0" rIns="0" bIns="0" rtlCol="0" anchor="t"/>
+          <a:lstStyle/>
+          <a:p>
+            <a:pPr indent="0" marL="0">
+              <a:buNone/>
+            </a:pPr>
+            <a:r>
+              <a:rPr lang="en-US" sz="1600" b="1" dirty="0">
+                <a:solidFill>
+                  <a:schemeClr val="tx1"/>
+                </a:solidFill>
+              </a:rPr>
+              <a:t>Maven 그룹</a:t>
+            </a:r>
+            <a:endParaRPr lang="en-US" sz="1600" dirty="0"/>
+          </a:p>
+          <a:p>
+            <a:pPr indent="0" marL="0">
+              <a:buNone/>
+            </a:pPr>
+            <a:r>
+              <a:rPr lang="en-US" sz="1400" dirty="0">
+                <a:solidFill>
+                  <a:schemeClr val="tx2"/>
+                </a:solidFill>
+              </a:rPr>
+              <a:t>Show View &gt; Maven &gt; Maven Goals에서 열며, 탭에 Maven 아이콘이 표시됩니다.</a:t>
+            </a:r>
+            <a:endParaRPr lang="en-US" sz="1600" dirty="0"/>
           </a:p>
         </p:txBody>
       </p:sp>
@@ -2702,12 +2962,36 @@
             <a:pPr algn="r"/>
             <a:fld id="{F7021451-1387-4CA6-816F-3879F97B5CBC}" type="slidenum">
               <a:rPr b="0" lang="en-US"/>
-              <a:t>9</a:t>
+              <a:t>7</a:t>
             </a:fld>
             <a:endParaRPr lang="en-US"/>
           </a:p>
         </p:txBody>
       </p:sp>
+      <p:pic>
+        <p:nvPicPr>
+          <p:cNvPr id="26" name="Latest view screenshot" descr="view_top.png"/>
+          <p:cNvPicPr>
+            <a:picLocks noChangeAspect="1"/>
+          </p:cNvPicPr>
+          <p:nvPr/>
+        </p:nvPicPr>
+        <p:blipFill>
+          <a:blip r:embed="rId2"/>
+          <a:stretch>
+            <a:fillRect/>
+          </a:stretch>
+        </p:blipFill>
+        <p:spPr>
+          <a:xfrm>
+            <a:off x="569595" y="1097280"/>
+            <a:ext cx="4530090" cy="2774940"/>
+          </a:xfrm>
+          <a:prstGeom prst="rect">
+            <a:avLst/>
+          </a:prstGeom>
+        </p:spPr>
+      </p:pic>
     </p:spTree>
   </p:cSld>
   <p:clrMapOvr>
@@ -6854,22 +7138,15 @@
 </file>
 
 <file path=ppt/slides/slide9.xml><?xml version="1.0" encoding="utf-8"?>
-<p:sld xmlns:a="http://schemas.openxmlformats.org/drawingml/2006/main" xmlns:r="http://schemas.openxmlformats.org/officeDocument/2006/relationships" xmlns:p="http://schemas.openxmlformats.org/presentationml/2006/main">
-  <p:cSld name="Slide 9">
+<p:sld xmlns:a="http://schemas.openxmlformats.org/drawingml/2006/main" xmlns:p="http://schemas.openxmlformats.org/presentationml/2006/main" xmlns:r="http://schemas.openxmlformats.org/officeDocument/2006/relationships">
+  <p:cSld>
     <p:spTree>
       <p:nvGrpSpPr>
         <p:cNvPr id="1" name=""/>
         <p:cNvGrpSpPr/>
         <p:nvPr/>
       </p:nvGrpSpPr>
-      <p:grpSpPr>
-        <a:xfrm>
-          <a:off x="0" y="0"/>
-          <a:ext cx="0" cy="0"/>
-          <a:chOff x="0" y="0"/>
-          <a:chExt cx="0" cy="0"/>
-        </a:xfrm>
-      </p:grpSpPr>
+      <p:grpSpPr/>
       <p:sp>
         <p:nvSpPr>
           <p:cNvPr id="2" name="Title"/>
@@ -6903,7 +7180,7 @@
                 <a:ea typeface="Cambria" pitchFamily="34" charset="-122"/>
                 <a:cs typeface="Cambria" pitchFamily="34" charset="-120"/>
               </a:rPr>
-              <a:t>문제 해결</a:t>
+              <a:t>편의 기능</a:t>
             </a:r>
             <a:endParaRPr lang="en-US" sz="3200" dirty="0"/>
           </a:p>
@@ -6966,7 +7243,7 @@
                   <a:schemeClr val="tx1"/>
                 </a:solidFill>
               </a:rPr>
-              <a:t>뷰가 비어 있음</a:t>
+              <a:t>Goal 검색</a:t>
             </a:r>
             <a:endParaRPr lang="en-US" sz="1500" dirty="0"/>
           </a:p>
@@ -7002,7 +7279,7 @@
                   <a:schemeClr val="tx2"/>
                 </a:solidFill>
               </a:rPr>
-              <a:t>등록된 pom.xml이 없는 상태입니다. 드래그 앤 드롭이나 Add 버튼으로 등록하세요.</a:t>
+              <a:t>트리 위 검색창에 키워드를 입력하면 일치하는 goal만 표시됩니다. Esc로 해제합니다.</a:t>
             </a:r>
             <a:endParaRPr lang="en-US" sz="1300" dirty="0"/>
           </a:p>
@@ -7065,7 +7342,7 @@
                   <a:schemeClr val="tx1"/>
                 </a:solidFill>
               </a:rPr>
-              <a:t>mvn을 찾을 수 없음</a:t>
+              <a:t>즐겨찾기 / 최근 실행</a:t>
             </a:r>
             <a:endParaRPr lang="en-US" sz="1500" dirty="0"/>
           </a:p>
@@ -7101,7 +7378,7 @@
                   <a:schemeClr val="tx2"/>
                 </a:solidFill>
               </a:rPr>
-              <a:t>mvn 체크박스를 해제해 내장 Maven을 쓰거나, 터미널에서 mvn -v로 설치를 확인하세요.</a:t>
+              <a:t>우클릭 → Add to Favorites(★). 툴바 드롭다운에서 즐겨찾기와 최근 실행 10개를 바로 실행합니다.</a:t>
             </a:r>
             <a:endParaRPr lang="en-US" sz="1300" dirty="0"/>
           </a:p>
@@ -7164,7 +7441,7 @@
                   <a:schemeClr val="tx1"/>
                 </a:solidFill>
               </a:rPr>
-              <a:t>업데이트가 반영되지 않음</a:t>
+              <a:t>Run with Options…</a:t>
             </a:r>
             <a:endParaRPr lang="en-US" sz="1500" dirty="0"/>
           </a:p>
@@ -7200,7 +7477,7 @@
                   <a:schemeClr val="tx2"/>
                 </a:solidFill>
               </a:rPr>
-              <a:t>dropins 안에 같은 플러그인이 둘 이상이면 옛 jar가 로드됩니다. 하나만 남기고 -clean으로 재실행하세요.</a:t>
+              <a:t>우클릭 → goal 수정, 프로파일(-P), -DskipTests, -o, -U, 추가 인자를 지정해 실행합니다.</a:t>
             </a:r>
             <a:endParaRPr lang="en-US" sz="1300" dirty="0"/>
           </a:p>
@@ -7263,7 +7540,7 @@
                   <a:schemeClr val="tx1"/>
                 </a:solidFill>
               </a:rPr>
-              <a:t>플러그인이 보이지 않음</a:t>
+              <a:t>멀티 모듈</a:t>
             </a:r>
             <a:endParaRPr lang="en-US" sz="1500" dirty="0"/>
           </a:p>
@@ -7299,7 +7576,7 @@
                   <a:schemeClr val="tx2"/>
                 </a:solidFill>
               </a:rPr>
-              <a:t>Eclipse를 완전히 종료한 뒤 -clean으로 재실행해야 합니다. 같은 워크스페이스의 다른 인스턴스가 떠 있으면 무시됩니다.</a:t>
+              <a:t>부모 pom을 등록하면 &lt;modules&gt;의 하위 모듈이 Modules 폴더 아래에 함께 표시됩니다.</a:t>
             </a:r>
             <a:endParaRPr lang="en-US" sz="1300" dirty="0"/>
           </a:p>
